--- a/ispor-2026-causal-discovery/Poster Draft v0.1.pptx
+++ b/ispor-2026-causal-discovery/Poster Draft v0.1.pptx
@@ -255,7 +255,7 @@
       <p15:sldGuideLst xmlns:p15="http://schemas.microsoft.com/office/powerpoint/2012/main"/>
     </p:ext>
     <p:ext uri="GoogleSlidesCustomDataVersion2">
-      <go:slidesCustomData xmlns="" xmlns:mc="http://schemas.openxmlformats.org/markup-compatibility/2006" xmlns:mv="urn:schemas-microsoft-com:mac:vml" xmlns:c="http://schemas.openxmlformats.org/drawingml/2006/chart" xmlns:dgm="http://schemas.openxmlformats.org/drawingml/2006/diagram" xmlns:o="urn:schemas-microsoft-com:office:office" xmlns:v="urn:schemas-microsoft-com:vml" xmlns:pvml="urn:schemas-microsoft-com:office:powerpoint" xmlns:com="http://schemas.openxmlformats.org/drawingml/2006/compatibility" xmlns:p14="http://schemas.microsoft.com/office/powerpoint/2010/main" xmlns:p15="http://schemas.microsoft.com/office/powerpoint/2012/main" xmlns:ahyp="http://schemas.microsoft.com/office/drawing/2018/hyperlinkcolor" xmlns:go="http://customooxmlschemas.google.com/" r:id="rId11" roundtripDataSignature="AMtx7mjFaqWLE/HGfowgWYFJ0EbUeRfQ7w=="/>
+      <go:slidesCustomData xmlns:go="http://customooxmlschemas.google.com/" xmlns:ahyp="http://schemas.microsoft.com/office/drawing/2018/hyperlinkcolor" xmlns:p15="http://schemas.microsoft.com/office/powerpoint/2012/main" xmlns:p14="http://schemas.microsoft.com/office/powerpoint/2010/main" xmlns:com="http://schemas.openxmlformats.org/drawingml/2006/compatibility" xmlns:pvml="urn:schemas-microsoft-com:office:powerpoint" xmlns:v="urn:schemas-microsoft-com:vml" xmlns:o="urn:schemas-microsoft-com:office:office" xmlns:dgm="http://schemas.openxmlformats.org/drawingml/2006/diagram" xmlns:c="http://schemas.openxmlformats.org/drawingml/2006/chart" xmlns:mv="urn:schemas-microsoft-com:mac:vml" xmlns:mc="http://schemas.openxmlformats.org/markup-compatibility/2006" xmlns="" r:id="rId11" roundtripDataSignature="AMtx7mjFaqWLE/HGfowgWYFJ0EbUeRfQ7w=="/>
     </p:ext>
   </p:extLst>
 </p:presentation>
@@ -4252,7 +4252,7 @@
         </p:nvSpPr>
         <p:spPr>
           <a:xfrm>
-            <a:off x="306758" y="8377676"/>
+            <a:off x="679295" y="8377676"/>
             <a:ext cx="9842648" cy="20159324"/>
           </a:xfrm>
           <a:prstGeom prst="rect">
@@ -4652,7 +4652,7 @@
         </p:nvSpPr>
         <p:spPr>
           <a:xfrm>
-            <a:off x="35847867" y="23543858"/>
+            <a:off x="35847867" y="29233459"/>
             <a:ext cx="7941482" cy="1754286"/>
           </a:xfrm>
           <a:prstGeom prst="rect">
@@ -4864,7 +4864,7 @@
         </p:nvSpPr>
         <p:spPr>
           <a:xfrm>
-            <a:off x="34560633" y="23824894"/>
+            <a:off x="34560633" y="29514495"/>
             <a:ext cx="910567" cy="1120436"/>
           </a:xfrm>
           <a:custGeom>
@@ -4996,426 +4996,6 @@
       </p:sp>
       <p:sp>
         <p:nvSpPr>
-          <p:cNvPr id="109" name="Google Shape;109;p1" descr="Graphic 7"/>
-          <p:cNvSpPr/>
-          <p:nvPr/>
-        </p:nvSpPr>
-        <p:spPr>
-          <a:xfrm>
-            <a:off x="6913077" y="29749453"/>
-            <a:ext cx="1528034" cy="2778605"/>
-          </a:xfrm>
-          <a:custGeom>
-            <a:avLst/>
-            <a:gdLst/>
-            <a:ahLst/>
-            <a:cxnLst/>
-            <a:rect l="l" t="t" r="r" b="b"/>
-            <a:pathLst>
-              <a:path w="21600" h="21600" extrusionOk="0">
-                <a:moveTo>
-                  <a:pt x="3248" y="0"/>
-                </a:moveTo>
-                <a:cubicBezTo>
-                  <a:pt x="1462" y="0"/>
-                  <a:pt x="0" y="864"/>
-                  <a:pt x="0" y="1920"/>
-                </a:cubicBezTo>
-                <a:lnTo>
-                  <a:pt x="0" y="19680"/>
-                </a:lnTo>
-                <a:cubicBezTo>
-                  <a:pt x="0" y="20736"/>
-                  <a:pt x="1462" y="21600"/>
-                  <a:pt x="3248" y="21600"/>
-                </a:cubicBezTo>
-                <a:lnTo>
-                  <a:pt x="18352" y="21600"/>
-                </a:lnTo>
-                <a:cubicBezTo>
-                  <a:pt x="20138" y="21600"/>
-                  <a:pt x="21600" y="20736"/>
-                  <a:pt x="21600" y="19680"/>
-                </a:cubicBezTo>
-                <a:lnTo>
-                  <a:pt x="21600" y="1920"/>
-                </a:lnTo>
-                <a:cubicBezTo>
-                  <a:pt x="21600" y="864"/>
-                  <a:pt x="20138" y="0"/>
-                  <a:pt x="18352" y="0"/>
-                </a:cubicBezTo>
-                <a:lnTo>
-                  <a:pt x="3248" y="0"/>
-                </a:lnTo>
-                <a:close/>
-                <a:moveTo>
-                  <a:pt x="8990" y="1849"/>
-                </a:moveTo>
-                <a:lnTo>
-                  <a:pt x="12611" y="1849"/>
-                </a:lnTo>
-                <a:cubicBezTo>
-                  <a:pt x="12849" y="1849"/>
-                  <a:pt x="13042" y="2010"/>
-                  <a:pt x="13042" y="2209"/>
-                </a:cubicBezTo>
-                <a:cubicBezTo>
-                  <a:pt x="13042" y="2408"/>
-                  <a:pt x="12849" y="2569"/>
-                  <a:pt x="12611" y="2569"/>
-                </a:cubicBezTo>
-                <a:lnTo>
-                  <a:pt x="8990" y="2569"/>
-                </a:lnTo>
-                <a:cubicBezTo>
-                  <a:pt x="8752" y="2569"/>
-                  <a:pt x="8559" y="2408"/>
-                  <a:pt x="8559" y="2209"/>
-                </a:cubicBezTo>
-                <a:cubicBezTo>
-                  <a:pt x="8559" y="2010"/>
-                  <a:pt x="8752" y="1849"/>
-                  <a:pt x="8990" y="1849"/>
-                </a:cubicBezTo>
-                <a:close/>
-                <a:moveTo>
-                  <a:pt x="1784" y="4416"/>
-                </a:moveTo>
-                <a:lnTo>
-                  <a:pt x="19816" y="4416"/>
-                </a:lnTo>
-                <a:lnTo>
-                  <a:pt x="19816" y="17184"/>
-                </a:lnTo>
-                <a:lnTo>
-                  <a:pt x="1784" y="17184"/>
-                </a:lnTo>
-                <a:lnTo>
-                  <a:pt x="1784" y="4416"/>
-                </a:lnTo>
-                <a:close/>
-                <a:moveTo>
-                  <a:pt x="10800" y="18203"/>
-                </a:moveTo>
-                <a:cubicBezTo>
-                  <a:pt x="10800" y="18203"/>
-                  <a:pt x="10800" y="18203"/>
-                  <a:pt x="10800" y="18203"/>
-                </a:cubicBezTo>
-                <a:cubicBezTo>
-                  <a:pt x="11911" y="18203"/>
-                  <a:pt x="12811" y="18736"/>
-                  <a:pt x="12811" y="19392"/>
-                </a:cubicBezTo>
-                <a:cubicBezTo>
-                  <a:pt x="12811" y="19392"/>
-                  <a:pt x="12811" y="19392"/>
-                  <a:pt x="12811" y="19392"/>
-                </a:cubicBezTo>
-                <a:cubicBezTo>
-                  <a:pt x="12811" y="19392"/>
-                  <a:pt x="12811" y="19392"/>
-                  <a:pt x="12811" y="19392"/>
-                </a:cubicBezTo>
-                <a:cubicBezTo>
-                  <a:pt x="12811" y="20049"/>
-                  <a:pt x="11911" y="20581"/>
-                  <a:pt x="10800" y="20581"/>
-                </a:cubicBezTo>
-                <a:cubicBezTo>
-                  <a:pt x="10800" y="20581"/>
-                  <a:pt x="10800" y="20581"/>
-                  <a:pt x="10800" y="20581"/>
-                </a:cubicBezTo>
-                <a:cubicBezTo>
-                  <a:pt x="10800" y="20581"/>
-                  <a:pt x="10800" y="20581"/>
-                  <a:pt x="10800" y="20581"/>
-                </a:cubicBezTo>
-                <a:cubicBezTo>
-                  <a:pt x="9690" y="20581"/>
-                  <a:pt x="8789" y="20049"/>
-                  <a:pt x="8789" y="19392"/>
-                </a:cubicBezTo>
-                <a:cubicBezTo>
-                  <a:pt x="8789" y="19392"/>
-                  <a:pt x="8789" y="19392"/>
-                  <a:pt x="8789" y="19392"/>
-                </a:cubicBezTo>
-                <a:cubicBezTo>
-                  <a:pt x="8789" y="19392"/>
-                  <a:pt x="8789" y="19392"/>
-                  <a:pt x="8789" y="19392"/>
-                </a:cubicBezTo>
-                <a:cubicBezTo>
-                  <a:pt x="8789" y="18736"/>
-                  <a:pt x="9690" y="18203"/>
-                  <a:pt x="10800" y="18203"/>
-                </a:cubicBezTo>
-                <a:cubicBezTo>
-                  <a:pt x="10800" y="18203"/>
-                  <a:pt x="10800" y="18203"/>
-                  <a:pt x="10800" y="18203"/>
-                </a:cubicBezTo>
-                <a:close/>
-              </a:path>
-            </a:pathLst>
-          </a:custGeom>
-          <a:solidFill>
-            <a:schemeClr val="tx2">
-              <a:lumMod val="50000"/>
-            </a:schemeClr>
-          </a:solidFill>
-          <a:ln>
-            <a:noFill/>
-          </a:ln>
-        </p:spPr>
-        <p:txBody>
-          <a:bodyPr spcFirstLastPara="1" wrap="square" lIns="45700" tIns="45700" rIns="45700" bIns="45700" anchor="ctr" anchorCtr="0">
-            <a:noAutofit/>
-          </a:bodyPr>
-          <a:lstStyle/>
-          <a:p>
-            <a:pPr marL="0" marR="0" lvl="0" indent="0" algn="l" rtl="0">
-              <a:lnSpc>
-                <a:spcPct val="100000"/>
-              </a:lnSpc>
-              <a:spcBef>
-                <a:spcPts val="0"/>
-              </a:spcBef>
-              <a:spcAft>
-                <a:spcPts val="0"/>
-              </a:spcAft>
-              <a:buClr>
-                <a:srgbClr val="000000"/>
-              </a:buClr>
-              <a:buSzPts val="7258"/>
-              <a:buFont typeface="Arial"/>
-              <a:buNone/>
-            </a:pPr>
-            <a:endParaRPr sz="7258" b="0" i="0" u="none" strike="noStrike" cap="none">
-              <a:solidFill>
-                <a:srgbClr val="D9D9D9"/>
-              </a:solidFill>
-              <a:latin typeface="Calibri"/>
-              <a:ea typeface="Calibri"/>
-              <a:cs typeface="Calibri"/>
-              <a:sym typeface="Calibri"/>
-            </a:endParaRPr>
-          </a:p>
-        </p:txBody>
-      </p:sp>
-      <p:cxnSp>
-        <p:nvCxnSpPr>
-          <p:cNvPr id="111" name="Google Shape;111;p1" descr="Straight Arrow Connector 23"/>
-          <p:cNvCxnSpPr/>
-          <p:nvPr/>
-        </p:nvCxnSpPr>
-        <p:spPr>
-          <a:xfrm rot="10800000">
-            <a:off x="4986281" y="30787041"/>
-            <a:ext cx="1296988" cy="0"/>
-          </a:xfrm>
-          <a:prstGeom prst="straightConnector1">
-            <a:avLst/>
-          </a:prstGeom>
-          <a:noFill/>
-          <a:ln w="66675" cap="flat" cmpd="sng">
-            <a:solidFill>
-              <a:schemeClr val="bg2"/>
-            </a:solidFill>
-            <a:prstDash val="dot"/>
-            <a:round/>
-            <a:headEnd type="none" w="sm" len="sm"/>
-            <a:tailEnd type="triangle" w="med" len="med"/>
-          </a:ln>
-        </p:spPr>
-      </p:cxnSp>
-      <p:sp>
-        <p:nvSpPr>
-          <p:cNvPr id="114" name="Google Shape;114;p1"/>
-          <p:cNvSpPr/>
-          <p:nvPr/>
-        </p:nvSpPr>
-        <p:spPr>
-          <a:xfrm>
-            <a:off x="11855064" y="27849276"/>
-            <a:ext cx="3938137" cy="3938137"/>
-          </a:xfrm>
-          <a:prstGeom prst="rect">
-            <a:avLst/>
-          </a:prstGeom>
-          <a:solidFill>
-            <a:schemeClr val="lt1"/>
-          </a:solidFill>
-          <a:ln>
-            <a:noFill/>
-          </a:ln>
-        </p:spPr>
-        <p:txBody>
-          <a:bodyPr spcFirstLastPara="1" wrap="square" lIns="91425" tIns="45700" rIns="91425" bIns="45700" anchor="ctr" anchorCtr="0">
-            <a:noAutofit/>
-          </a:bodyPr>
-          <a:lstStyle/>
-          <a:p>
-            <a:pPr marL="0" marR="0" lvl="0" indent="0" algn="ctr" rtl="0">
-              <a:lnSpc>
-                <a:spcPct val="100000"/>
-              </a:lnSpc>
-              <a:spcBef>
-                <a:spcPts val="0"/>
-              </a:spcBef>
-              <a:spcAft>
-                <a:spcPts val="0"/>
-              </a:spcAft>
-              <a:buClr>
-                <a:srgbClr val="000000"/>
-              </a:buClr>
-              <a:buSzPts val="7258"/>
-              <a:buFont typeface="Arial"/>
-              <a:buNone/>
-            </a:pPr>
-            <a:endParaRPr sz="7258" b="0" i="0" u="none" strike="noStrike" cap="none">
-              <a:solidFill>
-                <a:schemeClr val="lt1"/>
-              </a:solidFill>
-              <a:latin typeface="Calibri"/>
-              <a:ea typeface="Calibri"/>
-              <a:cs typeface="Calibri"/>
-              <a:sym typeface="Calibri"/>
-            </a:endParaRPr>
-          </a:p>
-        </p:txBody>
-      </p:sp>
-      <p:sp>
-        <p:nvSpPr>
-          <p:cNvPr id="115" name="Google Shape;115;p1"/>
-          <p:cNvSpPr txBox="1"/>
-          <p:nvPr/>
-        </p:nvSpPr>
-        <p:spPr>
-          <a:xfrm>
-            <a:off x="5557913" y="28723977"/>
-            <a:ext cx="3322029" cy="646331"/>
-          </a:xfrm>
-          <a:prstGeom prst="rect">
-            <a:avLst/>
-          </a:prstGeom>
-          <a:noFill/>
-          <a:ln>
-            <a:noFill/>
-          </a:ln>
-        </p:spPr>
-        <p:txBody>
-          <a:bodyPr spcFirstLastPara="1" wrap="square" lIns="91425" tIns="45700" rIns="91425" bIns="45700" anchor="t" anchorCtr="0">
-            <a:spAutoFit/>
-          </a:bodyPr>
-          <a:lstStyle/>
-          <a:p>
-            <a:pPr marL="0" marR="0" lvl="0" indent="0" algn="l" rtl="0">
-              <a:lnSpc>
-                <a:spcPct val="100000"/>
-              </a:lnSpc>
-              <a:spcBef>
-                <a:spcPts val="0"/>
-              </a:spcBef>
-              <a:spcAft>
-                <a:spcPts val="0"/>
-              </a:spcAft>
-              <a:buClr>
-                <a:srgbClr val="000000"/>
-              </a:buClr>
-              <a:buSzPts val="3600"/>
-              <a:buFont typeface="Arial"/>
-              <a:buNone/>
-            </a:pPr>
-            <a:r>
-              <a:rPr lang="en-US" sz="3600" b="0" i="0" u="none" strike="noStrike" cap="none" dirty="0">
-                <a:solidFill>
-                  <a:schemeClr val="dk1"/>
-                </a:solidFill>
-                <a:latin typeface="Arial"/>
-                <a:ea typeface="Arial"/>
-                <a:cs typeface="Arial"/>
-                <a:sym typeface="Arial"/>
-              </a:rPr>
-              <a:t>QR Code</a:t>
-            </a:r>
-            <a:endParaRPr sz="1400" b="0" i="0" u="none" strike="noStrike" cap="none" dirty="0">
-              <a:solidFill>
-                <a:srgbClr val="000000"/>
-              </a:solidFill>
-              <a:latin typeface="Arial"/>
-              <a:ea typeface="Arial"/>
-              <a:cs typeface="Arial"/>
-              <a:sym typeface="Arial"/>
-            </a:endParaRPr>
-          </a:p>
-        </p:txBody>
-      </p:sp>
-      <p:pic>
-        <p:nvPicPr>
-          <p:cNvPr id="7" name="Picture 6">
-            <a:extLst>
-              <a:ext uri="{FF2B5EF4-FFF2-40B4-BE49-F238E27FC236}">
-                <a16:creationId xmlns:a16="http://schemas.microsoft.com/office/drawing/2014/main" id="{AF6A4E7C-BFA2-CDA5-03A0-E4A75F16E6B2}"/>
-              </a:ext>
-            </a:extLst>
-          </p:cNvPr>
-          <p:cNvPicPr>
-            <a:picLocks noChangeAspect="1"/>
-          </p:cNvPicPr>
-          <p:nvPr/>
-        </p:nvPicPr>
-        <p:blipFill>
-          <a:blip r:embed="rId4"/>
-          <a:stretch>
-            <a:fillRect/>
-          </a:stretch>
-        </p:blipFill>
-        <p:spPr>
-          <a:xfrm>
-            <a:off x="41105553" y="28786193"/>
-            <a:ext cx="2404453" cy="2224119"/>
-          </a:xfrm>
-          <a:prstGeom prst="rect">
-            <a:avLst/>
-          </a:prstGeom>
-        </p:spPr>
-      </p:pic>
-      <p:pic>
-        <p:nvPicPr>
-          <p:cNvPr id="11" name="Picture 10">
-            <a:extLst>
-              <a:ext uri="{FF2B5EF4-FFF2-40B4-BE49-F238E27FC236}">
-                <a16:creationId xmlns:a16="http://schemas.microsoft.com/office/drawing/2014/main" id="{FC0577E7-B18E-2206-4007-691B14228D68}"/>
-              </a:ext>
-            </a:extLst>
-          </p:cNvPr>
-          <p:cNvPicPr>
-            <a:picLocks noChangeAspect="1"/>
-          </p:cNvPicPr>
-          <p:nvPr/>
-        </p:nvPicPr>
-        <p:blipFill>
-          <a:blip r:embed="rId5"/>
-          <a:stretch>
-            <a:fillRect/>
-          </a:stretch>
-        </p:blipFill>
-        <p:spPr>
-          <a:xfrm>
-            <a:off x="306758" y="28652684"/>
-            <a:ext cx="4205561" cy="4205561"/>
-          </a:xfrm>
-          <a:prstGeom prst="rect">
-            <a:avLst/>
-          </a:prstGeom>
-        </p:spPr>
-      </p:pic>
-      <p:sp>
-        <p:nvSpPr>
           <p:cNvPr id="21" name="TextBox 20">
             <a:extLst>
               <a:ext uri="{FF2B5EF4-FFF2-40B4-BE49-F238E27FC236}">
@@ -5428,7 +5008,7 @@
         </p:nvSpPr>
         <p:spPr>
           <a:xfrm>
-            <a:off x="35015917" y="4683504"/>
+            <a:off x="34778848" y="10373105"/>
             <a:ext cx="8746783" cy="17943374"/>
           </a:xfrm>
           <a:prstGeom prst="rect">
@@ -5536,7 +5116,7 @@
         </p:nvSpPr>
         <p:spPr>
           <a:xfrm>
-            <a:off x="34670483" y="386081"/>
+            <a:off x="34433414" y="6075682"/>
             <a:ext cx="9027790" cy="2800767"/>
           </a:xfrm>
           <a:prstGeom prst="rect">
@@ -5584,36 +5164,6 @@
       </p:sp>
       <p:pic>
         <p:nvPicPr>
-          <p:cNvPr id="16" name="Picture 15">
-            <a:extLst>
-              <a:ext uri="{FF2B5EF4-FFF2-40B4-BE49-F238E27FC236}">
-                <a16:creationId xmlns:a16="http://schemas.microsoft.com/office/drawing/2014/main" id="{88E5B43C-1CCD-0480-6215-17BEFDEC32E3}"/>
-              </a:ext>
-            </a:extLst>
-          </p:cNvPr>
-          <p:cNvPicPr>
-            <a:picLocks noChangeAspect="1"/>
-          </p:cNvPicPr>
-          <p:nvPr/>
-        </p:nvPicPr>
-        <p:blipFill>
-          <a:blip r:embed="rId6"/>
-          <a:stretch>
-            <a:fillRect/>
-          </a:stretch>
-        </p:blipFill>
-        <p:spPr>
-          <a:xfrm>
-            <a:off x="34026974" y="28322280"/>
-            <a:ext cx="5469338" cy="1637443"/>
-          </a:xfrm>
-          <a:prstGeom prst="rect">
-            <a:avLst/>
-          </a:prstGeom>
-        </p:spPr>
-      </p:pic>
-      <p:pic>
-        <p:nvPicPr>
           <p:cNvPr id="5" name="Graphic 4">
             <a:extLst>
               <a:ext uri="{FF2B5EF4-FFF2-40B4-BE49-F238E27FC236}">
@@ -5630,7 +5180,7 @@
           <a:blip>
             <a:extLst>
               <a:ext uri="{96DAC541-7B7A-43D3-8B79-37D633B846F1}">
-                <asvg:svgBlip xmlns:asvg="http://schemas.microsoft.com/office/drawing/2016/SVG/main" r:embed="rId7"/>
+                <asvg:svgBlip xmlns:asvg="http://schemas.microsoft.com/office/drawing/2016/SVG/main" r:embed="rId4"/>
               </a:ext>
             </a:extLst>
           </a:blip>
@@ -5663,7 +5213,7 @@
           <p:nvPr/>
         </p:nvPicPr>
         <p:blipFill>
-          <a:blip r:embed="rId8"/>
+          <a:blip r:embed="rId5"/>
           <a:srcRect l="5276" t="3286" r="6735" b="5417"/>
           <a:stretch>
             <a:fillRect/>
@@ -5694,7 +5244,7 @@
           <p:nvPr/>
         </p:nvPicPr>
         <p:blipFill>
-          <a:blip r:embed="rId9" cstate="print">
+          <a:blip r:embed="rId6" cstate="print">
             <a:extLst>
               <a:ext uri="{28A0092B-C50C-407E-A947-70E740481C1C}">
                 <a14:useLocalDpi xmlns:a14="http://schemas.microsoft.com/office/drawing/2010/main" val="0"/>
@@ -5730,7 +5280,7 @@
           <p:nvPr/>
         </p:nvPicPr>
         <p:blipFill>
-          <a:blip r:embed="rId10"/>
+          <a:blip r:embed="rId7"/>
           <a:srcRect t="46927"/>
           <a:stretch>
             <a:fillRect/>
@@ -5738,7 +5288,7 @@
         </p:blipFill>
         <p:spPr>
           <a:xfrm>
-            <a:off x="15250885" y="27652216"/>
+            <a:off x="14709018" y="27652216"/>
             <a:ext cx="14321253" cy="5237240"/>
           </a:xfrm>
           <a:prstGeom prst="rect">
@@ -5869,7 +5419,7 @@
           <p:nvPr/>
         </p:nvPicPr>
         <p:blipFill>
-          <a:blip r:embed="rId10"/>
+          <a:blip r:embed="rId7"/>
           <a:srcRect r="15791" b="55762"/>
           <a:stretch>
             <a:fillRect/>
@@ -5877,7 +5427,7 @@
         </p:blipFill>
         <p:spPr>
           <a:xfrm>
-            <a:off x="26784300" y="29749453"/>
+            <a:off x="26242433" y="29749453"/>
             <a:ext cx="6384149" cy="2310954"/>
           </a:xfrm>
           <a:prstGeom prst="rect">
@@ -5959,7 +5509,7 @@
           <p:nvPr/>
         </p:nvPicPr>
         <p:blipFill rotWithShape="1">
-          <a:blip r:embed="rId11">
+          <a:blip r:embed="rId8">
             <a:alphaModFix/>
           </a:blip>
           <a:srcRect/>
@@ -5967,7 +5517,7 @@
         </p:blipFill>
         <p:spPr>
           <a:xfrm>
-            <a:off x="34367608" y="30287173"/>
+            <a:off x="790221" y="30348256"/>
             <a:ext cx="6845087" cy="2696549"/>
           </a:xfrm>
           <a:prstGeom prst="rect">
@@ -5993,8 +5543,8 @@
         </p:nvSpPr>
         <p:spPr>
           <a:xfrm>
-            <a:off x="34440889" y="144127"/>
-            <a:ext cx="9395093" cy="23128734"/>
+            <a:off x="34405861" y="5205789"/>
+            <a:ext cx="9193052" cy="23756673"/>
           </a:xfrm>
           <a:prstGeom prst="roundRect">
             <a:avLst>
@@ -6042,7 +5592,7 @@
         </p:nvSpPr>
         <p:spPr>
           <a:xfrm>
-            <a:off x="157486" y="8197765"/>
+            <a:off x="394555" y="8197765"/>
             <a:ext cx="10259676" cy="20159324"/>
           </a:xfrm>
           <a:prstGeom prst="roundRect">
@@ -6129,7 +5679,7 @@
         </p:nvSpPr>
         <p:spPr>
           <a:xfrm>
-            <a:off x="35015916" y="25783722"/>
+            <a:off x="35015916" y="31473323"/>
             <a:ext cx="8093883" cy="954067"/>
           </a:xfrm>
           <a:prstGeom prst="rect">
@@ -6219,6 +5769,137 @@
               <a:cs typeface="Arial"/>
               <a:sym typeface="Arial"/>
             </a:endParaRPr>
+          </a:p>
+        </p:txBody>
+      </p:sp>
+      <p:pic>
+        <p:nvPicPr>
+          <p:cNvPr id="6" name="Picture 5">
+            <a:extLst>
+              <a:ext uri="{FF2B5EF4-FFF2-40B4-BE49-F238E27FC236}">
+                <a16:creationId xmlns:a16="http://schemas.microsoft.com/office/drawing/2014/main" id="{29DC7077-065C-B903-4C73-B7EA1E4FDE52}"/>
+              </a:ext>
+            </a:extLst>
+          </p:cNvPr>
+          <p:cNvPicPr>
+            <a:picLocks noChangeAspect="1"/>
+          </p:cNvPicPr>
+          <p:nvPr/>
+        </p:nvPicPr>
+        <p:blipFill>
+          <a:blip r:embed="rId9"/>
+          <a:stretch>
+            <a:fillRect/>
+          </a:stretch>
+        </p:blipFill>
+        <p:spPr>
+          <a:xfrm>
+            <a:off x="7602602" y="28882085"/>
+            <a:ext cx="2404453" cy="2224119"/>
+          </a:xfrm>
+          <a:prstGeom prst="rect">
+            <a:avLst/>
+          </a:prstGeom>
+        </p:spPr>
+      </p:pic>
+      <p:pic>
+        <p:nvPicPr>
+          <p:cNvPr id="8" name="Picture 7">
+            <a:extLst>
+              <a:ext uri="{FF2B5EF4-FFF2-40B4-BE49-F238E27FC236}">
+                <a16:creationId xmlns:a16="http://schemas.microsoft.com/office/drawing/2014/main" id="{E5A3DE82-5683-6794-5031-281F3286941F}"/>
+              </a:ext>
+            </a:extLst>
+          </p:cNvPr>
+          <p:cNvPicPr>
+            <a:picLocks noChangeAspect="1"/>
+          </p:cNvPicPr>
+          <p:nvPr/>
+        </p:nvPicPr>
+        <p:blipFill>
+          <a:blip r:embed="rId10"/>
+          <a:stretch>
+            <a:fillRect/>
+          </a:stretch>
+        </p:blipFill>
+        <p:spPr>
+          <a:xfrm>
+            <a:off x="524023" y="28418172"/>
+            <a:ext cx="5469338" cy="1637443"/>
+          </a:xfrm>
+          <a:prstGeom prst="rect">
+            <a:avLst/>
+          </a:prstGeom>
+        </p:spPr>
+      </p:pic>
+      <p:sp>
+        <p:nvSpPr>
+          <p:cNvPr id="10" name="Rectangle: Rounded Corners 9">
+            <a:extLst>
+              <a:ext uri="{FF2B5EF4-FFF2-40B4-BE49-F238E27FC236}">
+                <a16:creationId xmlns:a16="http://schemas.microsoft.com/office/drawing/2014/main" id="{C2FDDE52-A371-753A-7CE1-C20D2C154D62}"/>
+              </a:ext>
+            </a:extLst>
+          </p:cNvPr>
+          <p:cNvSpPr/>
+          <p:nvPr/>
+        </p:nvSpPr>
+        <p:spPr>
+          <a:xfrm>
+            <a:off x="38167733" y="491009"/>
+            <a:ext cx="4942066" cy="2590857"/>
+          </a:xfrm>
+          <a:prstGeom prst="roundRect">
+            <a:avLst/>
+          </a:prstGeom>
+          <a:solidFill>
+            <a:srgbClr val="002060">
+              <a:alpha val="30196"/>
+            </a:srgbClr>
+          </a:solidFill>
+          <a:ln>
+            <a:solidFill>
+              <a:schemeClr val="bg1"/>
+            </a:solidFill>
+          </a:ln>
+        </p:spPr>
+        <p:style>
+          <a:lnRef idx="2">
+            <a:schemeClr val="accent1">
+              <a:shade val="15000"/>
+            </a:schemeClr>
+          </a:lnRef>
+          <a:fillRef idx="1">
+            <a:schemeClr val="accent1"/>
+          </a:fillRef>
+          <a:effectRef idx="0">
+            <a:schemeClr val="accent1"/>
+          </a:effectRef>
+          <a:fontRef idx="minor">
+            <a:schemeClr val="lt1"/>
+          </a:fontRef>
+        </p:style>
+        <p:txBody>
+          <a:bodyPr rtlCol="0" anchor="ctr"/>
+          <a:lstStyle/>
+          <a:p>
+            <a:pPr algn="ctr"/>
+            <a:r>
+              <a:rPr lang="en-US" sz="7200" dirty="0">
+                <a:solidFill>
+                  <a:schemeClr val="tx1"/>
+                </a:solidFill>
+              </a:rPr>
+              <a:t>MSR72</a:t>
+            </a:r>
+            <a:r>
+              <a:rPr lang="en-US" dirty="0">
+                <a:solidFill>
+                  <a:schemeClr val="tx1"/>
+                </a:solidFill>
+              </a:rPr>
+              <a:t> </a:t>
+            </a:r>
           </a:p>
         </p:txBody>
       </p:sp>
